--- a/embedded/RobotOperatingSystem/Yahboom_RaspBotV2.pptx
+++ b/embedded/RobotOperatingSystem/Yahboom_RaspBotV2.pptx
@@ -248,7 +248,7 @@
           <a:p>
             <a:fld id="{0C38313F-85CE-48B7-B0B9-F26100672579}" type="datetimeFigureOut">
               <a:rPr lang="en-US" smtClean="0"/>
-              <a:t>5/29/2026</a:t>
+              <a:t>6/2/2026</a:t>
             </a:fld>
             <a:endParaRPr lang="en-US"/>
           </a:p>
@@ -418,7 +418,7 @@
           <a:p>
             <a:fld id="{0C38313F-85CE-48B7-B0B9-F26100672579}" type="datetimeFigureOut">
               <a:rPr lang="en-US" smtClean="0"/>
-              <a:t>5/29/2026</a:t>
+              <a:t>6/2/2026</a:t>
             </a:fld>
             <a:endParaRPr lang="en-US"/>
           </a:p>
@@ -598,7 +598,7 @@
           <a:p>
             <a:fld id="{0C38313F-85CE-48B7-B0B9-F26100672579}" type="datetimeFigureOut">
               <a:rPr lang="en-US" smtClean="0"/>
-              <a:t>5/29/2026</a:t>
+              <a:t>6/2/2026</a:t>
             </a:fld>
             <a:endParaRPr lang="en-US"/>
           </a:p>
@@ -768,7 +768,7 @@
           <a:p>
             <a:fld id="{0C38313F-85CE-48B7-B0B9-F26100672579}" type="datetimeFigureOut">
               <a:rPr lang="en-US" smtClean="0"/>
-              <a:t>5/29/2026</a:t>
+              <a:t>6/2/2026</a:t>
             </a:fld>
             <a:endParaRPr lang="en-US"/>
           </a:p>
@@ -1014,7 +1014,7 @@
           <a:p>
             <a:fld id="{0C38313F-85CE-48B7-B0B9-F26100672579}" type="datetimeFigureOut">
               <a:rPr lang="en-US" smtClean="0"/>
-              <a:t>5/29/2026</a:t>
+              <a:t>6/2/2026</a:t>
             </a:fld>
             <a:endParaRPr lang="en-US"/>
           </a:p>
@@ -1246,7 +1246,7 @@
           <a:p>
             <a:fld id="{0C38313F-85CE-48B7-B0B9-F26100672579}" type="datetimeFigureOut">
               <a:rPr lang="en-US" smtClean="0"/>
-              <a:t>5/29/2026</a:t>
+              <a:t>6/2/2026</a:t>
             </a:fld>
             <a:endParaRPr lang="en-US"/>
           </a:p>
@@ -1613,7 +1613,7 @@
           <a:p>
             <a:fld id="{0C38313F-85CE-48B7-B0B9-F26100672579}" type="datetimeFigureOut">
               <a:rPr lang="en-US" smtClean="0"/>
-              <a:t>5/29/2026</a:t>
+              <a:t>6/2/2026</a:t>
             </a:fld>
             <a:endParaRPr lang="en-US"/>
           </a:p>
@@ -1731,7 +1731,7 @@
           <a:p>
             <a:fld id="{0C38313F-85CE-48B7-B0B9-F26100672579}" type="datetimeFigureOut">
               <a:rPr lang="en-US" smtClean="0"/>
-              <a:t>5/29/2026</a:t>
+              <a:t>6/2/2026</a:t>
             </a:fld>
             <a:endParaRPr lang="en-US"/>
           </a:p>
@@ -1826,7 +1826,7 @@
           <a:p>
             <a:fld id="{0C38313F-85CE-48B7-B0B9-F26100672579}" type="datetimeFigureOut">
               <a:rPr lang="en-US" smtClean="0"/>
-              <a:t>5/29/2026</a:t>
+              <a:t>6/2/2026</a:t>
             </a:fld>
             <a:endParaRPr lang="en-US"/>
           </a:p>
@@ -2103,7 +2103,7 @@
           <a:p>
             <a:fld id="{0C38313F-85CE-48B7-B0B9-F26100672579}" type="datetimeFigureOut">
               <a:rPr lang="en-US" smtClean="0"/>
-              <a:t>5/29/2026</a:t>
+              <a:t>6/2/2026</a:t>
             </a:fld>
             <a:endParaRPr lang="en-US"/>
           </a:p>
@@ -2356,7 +2356,7 @@
           <a:p>
             <a:fld id="{0C38313F-85CE-48B7-B0B9-F26100672579}" type="datetimeFigureOut">
               <a:rPr lang="en-US" smtClean="0"/>
-              <a:t>5/29/2026</a:t>
+              <a:t>6/2/2026</a:t>
             </a:fld>
             <a:endParaRPr lang="en-US"/>
           </a:p>
@@ -2569,7 +2569,7 @@
           <a:p>
             <a:fld id="{0C38313F-85CE-48B7-B0B9-F26100672579}" type="datetimeFigureOut">
               <a:rPr lang="en-US" smtClean="0"/>
-              <a:t>5/29/2026</a:t>
+              <a:t>6/2/2026</a:t>
             </a:fld>
             <a:endParaRPr lang="en-US"/>
           </a:p>
@@ -3082,11 +3082,7 @@
           <a:p>
             <a:r>
               <a:rPr lang="en-US" dirty="0" smtClean="0"/>
-              <a:t>How </a:t>
-            </a:r>
-            <a:r>
-              <a:rPr lang="en-US" dirty="0" smtClean="0"/>
-              <a:t>to login &amp; call ROS commands</a:t>
+              <a:t>How to login &amp; call ROS commands</a:t>
             </a:r>
             <a:endParaRPr lang="en-US" dirty="0"/>
           </a:p>
@@ -3180,7 +3176,6 @@
               <a:rPr lang="en-US" dirty="0" smtClean="0"/>
               <a:t># Basic launch:</a:t>
             </a:r>
-            <a:endParaRPr lang="en-US" dirty="0" smtClean="0"/>
           </a:p>
           <a:p>
             <a:pPr lvl="1"/>
